--- a/docs/milestone_5/Milestone_5_Presentation.pptx
+++ b/docs/milestone_5/Milestone_5_Presentation.pptx
@@ -996,7 +996,116 @@
             </a:pPr>
             <a:r>
               <a:rPr lang="en"/>
-              <a:t>The NIST non-IID reference tool assessed the same first million lightning events using timestamp-byte, timestamp-bit and signed-amplitude-byte representations. The timestamp-byte estimate was 7.2620876454 bits per 8-bit sample. It is not a validated joint block entropy bound. SHA3 and Toeplitz output/provenance were implemented. Source-model validation and PQC integration remain future work.</a:t>
+              <a:t>Entropy describes how difficult the source is to predict. We assessed one million lightning events before hashing or mixing in operating-system randomness. We tested timestamp low bytes, timestamp low bits and signed-amplitude low bytes separately. The NIST non-IID estimates were 7.2621 bits per 8-bit timestamp sample, 0.8210 bits per 1-bit timestamp sample and 3.6798 bits per 8-bit amplitude sample. These are corpus estimates, not proof of independent samples or a validated secret-key entropy budget.</a:t>
+            </a:r>
+            <a:endParaRPr/>
+          </a:p>
+          <a:p>
+            <a:pPr indent="0" lvl="0" marL="0" rtl="0" algn="l">
+              <a:spcBef>
+                <a:spcPts val="0"/>
+              </a:spcBef>
+              <a:spcAft>
+                <a:spcPts val="0"/>
+              </a:spcAft>
+              <a:buNone/>
+            </a:pPr>
+            <a:r>
+              <a:t/>
+            </a:r>
+            <a:endParaRPr/>
+          </a:p>
+          <a:p>
+            <a:pPr indent="0" lvl="0" marL="0" rtl="0" algn="l">
+              <a:spcBef>
+                <a:spcPts val="0"/>
+              </a:spcBef>
+              <a:spcAft>
+                <a:spcPts val="0"/>
+              </a:spcAft>
+              <a:buNone/>
+            </a:pPr>
+            <a:r>
+              <a:rPr lang="en"/>
+              <a:t>SHA3 provides deterministic conditioning. Our Toeplitz implementation consumes 128 previously unused source bytes (1,024 input bits) and obtains a fresh 1,279-bit public OS seed to select the matrix for a 256-bit output. We retain the seed, consumed sample range and hashes so the calculation can be reproduced. The seed receives no lightning-entropy credit, and anyone with the complete input and seed can reproduce the result.</a:t>
+            </a:r>
+            <a:endParaRPr/>
+          </a:p>
+          <a:p>
+            <a:pPr indent="0" lvl="0" marL="0" rtl="0" algn="l">
+              <a:spcBef>
+                <a:spcPts val="0"/>
+              </a:spcBef>
+              <a:spcAft>
+                <a:spcPts val="0"/>
+              </a:spcAft>
+              <a:buNone/>
+            </a:pPr>
+            <a:r>
+              <a:t/>
+            </a:r>
+            <a:endParaRPr/>
+          </a:p>
+          <a:p>
+            <a:pPr indent="0" lvl="0" marL="0" rtl="0" algn="l">
+              <a:spcBef>
+                <a:spcPts val="0"/>
+              </a:spcBef>
+              <a:spcAft>
+                <a:spcPts val="0"/>
+              </a:spcAft>
+              <a:buNone/>
+            </a:pPr>
+            <a:r>
+              <a:rPr lang="en"/>
+              <a:t>Future work is to confirm sensor and timestamp behavior, assess dependence on unseen data, justify a conservative joint entropy bound, collect genuine restart data and calibrate repetition-count/adaptive-proportion health tests. The present per-symbol estimate alone does not guarantee 256 secret output bits.</a:t>
+            </a:r>
+            <a:endParaRPr/>
+          </a:p>
+          <a:p>
+            <a:pPr indent="0" lvl="0" marL="0" rtl="0" algn="l">
+              <a:spcBef>
+                <a:spcPts val="0"/>
+              </a:spcBef>
+              <a:spcAft>
+                <a:spcPts val="0"/>
+              </a:spcAft>
+              <a:buNone/>
+            </a:pPr>
+            <a:r>
+              <a:t/>
+            </a:r>
+            <a:endParaRPr/>
+          </a:p>
+          <a:p>
+            <a:pPr indent="0" lvl="0" marL="0" rtl="0" algn="l">
+              <a:spcBef>
+                <a:spcPts val="0"/>
+              </a:spcBef>
+              <a:spcAft>
+                <a:spcPts val="0"/>
+              </a:spcAft>
+              <a:buNone/>
+            </a:pPr>
+            <a:r>
+              <a:rPr lang="en"/>
+              <a:t>Sources: Lightning entropy assessment (October 15, 2026); Toeplitz extraction proof and implementation evidence and provisional source model (October 26, 2026).</a:t>
+            </a:r>
+            <a:endParaRPr/>
+          </a:p>
+          <a:p>
+            <a:pPr indent="0" lvl="0" marL="0" rtl="0" algn="l">
+              <a:spcBef>
+                <a:spcPts val="0"/>
+              </a:spcBef>
+              <a:spcAft>
+                <a:spcPts val="0"/>
+              </a:spcAft>
+              <a:buNone/>
+            </a:pPr>
+            <a:r>
+              <a:rPr lang="en"/>
+              <a:t>https://csrc.nist.gov/pubs/sp/800/90/b/final</a:t>
             </a:r>
             <a:endParaRPr/>
           </a:p>
@@ -12430,7 +12539,7 @@
             </a:pPr>
             <a:r>
               <a:rPr lang="en" sz="1800"/>
-              <a:t>Assessed 1,000,000 lightning events with the NIST non-IID tool.</a:t>
+              <a:t>Assessed 1,000,000 lightning events with the NIST non-IID tool to estimate unpredictability.</a:t>
             </a:r>
             <a:endParaRPr sz="1800"/>
           </a:p>
@@ -12450,7 +12559,7 @@
             </a:pPr>
             <a:r>
               <a:rPr lang="en" sz="1800"/>
-              <a:t>Timestamp bytes measured 7.2621 bits per 8-bit sample. This is a corpus estimate, not source validation.</a:t>
+              <a:t>Timestamp bytes: 7.2621 bits per 8-bit sample. Amplitude bytes: 3.6798. These estimates cannot simply be added.</a:t>
             </a:r>
             <a:endParaRPr sz="1800"/>
           </a:p>
@@ -12470,7 +12579,7 @@
             </a:pPr>
             <a:r>
               <a:rPr lang="en" sz="1800"/>
-              <a:t>Implemented SHA3 and Toeplitz output with downloadable provenance.</a:t>
+              <a:t>Implemented SHA3 and Toeplitz extraction. Toeplitz converts 128 source bytes into 256 output bits using a fresh public seed.</a:t>
             </a:r>
             <a:endParaRPr sz="1800"/>
           </a:p>
@@ -12490,7 +12599,7 @@
             </a:pPr>
             <a:r>
               <a:rPr lang="en" sz="1800"/>
-              <a:t>Next: validate source dependence and the joint entropy bound, then integrate PQC.</a:t>
+              <a:t>Next: validate dependence and joint input entropy, collect restart data, and add source-health tests.</a:t>
             </a:r>
             <a:endParaRPr sz="1800"/>
           </a:p>
@@ -12918,7 +13027,7 @@
             <a:tbl>
               <a:tblPr>
                 <a:noFill/>
-                <a:tableStyleId>{462DCEE4-3205-422B-AC97-C0F56D87B947}</a:tableStyleId>
+                <a:tableStyleId>{236F04E9-5020-487C-B299-A11F27DC5553}</a:tableStyleId>
               </a:tblPr>
               <a:tblGrid>
                 <a:gridCol w="2286000"/>
@@ -14497,7 +14606,7 @@
             <a:tbl>
               <a:tblPr>
                 <a:noFill/>
-                <a:tableStyleId>{462DCEE4-3205-422B-AC97-C0F56D87B947}</a:tableStyleId>
+                <a:tableStyleId>{236F04E9-5020-487C-B299-A11F27DC5553}</a:tableStyleId>
               </a:tblPr>
               <a:tblGrid>
                 <a:gridCol w="2921000"/>
@@ -15993,9 +16102,9 @@
 </file>
 
 <file path=ppt/theme/theme1.xml><?xml version="1.0" encoding="utf-8"?>
-<a:theme xmlns:a="http://schemas.openxmlformats.org/drawingml/2006/main" xmlns:r="http://schemas.openxmlformats.org/officeDocument/2006/relationships">
+<a:theme xmlns:a="http://schemas.openxmlformats.org/drawingml/2006/main" xmlns:r="http://schemas.openxmlformats.org/officeDocument/2006/relationships" name="Simple Light">
   <a:themeElements>
-    <a:clrScheme name="Default">
+    <a:clrScheme name="Simple Light">
       <a:dk1>
         <a:srgbClr val="000000"/>
       </a:dk1>
@@ -16003,34 +16112,34 @@
         <a:srgbClr val="FFFFFF"/>
       </a:lt1>
       <a:dk2>
-        <a:srgbClr val="158158"/>
+        <a:srgbClr val="595959"/>
       </a:dk2>
       <a:lt2>
-        <a:srgbClr val="F3F3F3"/>
+        <a:srgbClr val="EEEEEE"/>
       </a:lt2>
       <a:accent1>
-        <a:srgbClr val="058DC7"/>
+        <a:srgbClr val="4285F4"/>
       </a:accent1>
       <a:accent2>
-        <a:srgbClr val="50B432"/>
+        <a:srgbClr val="212121"/>
       </a:accent2>
       <a:accent3>
-        <a:srgbClr val="ED561B"/>
+        <a:srgbClr val="78909C"/>
       </a:accent3>
       <a:accent4>
-        <a:srgbClr val="EDEF00"/>
+        <a:srgbClr val="FFAB40"/>
       </a:accent4>
       <a:accent5>
-        <a:srgbClr val="24CBE5"/>
+        <a:srgbClr val="0097A7"/>
       </a:accent5>
       <a:accent6>
-        <a:srgbClr val="64E572"/>
+        <a:srgbClr val="EEFF41"/>
       </a:accent6>
       <a:hlink>
-        <a:srgbClr val="2200CC"/>
+        <a:srgbClr val="0097A7"/>
       </a:hlink>
       <a:folHlink>
-        <a:srgbClr val="551A8B"/>
+        <a:srgbClr val="0097A7"/>
       </a:folHlink>
     </a:clrScheme>
     <a:fontScheme name="Office">
@@ -16551,9 +16660,9 @@
 </file>
 
 <file path=ppt/theme/theme3.xml><?xml version="1.0" encoding="utf-8"?>
-<a:theme xmlns:a="http://schemas.openxmlformats.org/drawingml/2006/main" xmlns:r="http://schemas.openxmlformats.org/officeDocument/2006/relationships" name="Simple Light">
+<a:theme xmlns:a="http://schemas.openxmlformats.org/drawingml/2006/main" xmlns:r="http://schemas.openxmlformats.org/officeDocument/2006/relationships">
   <a:themeElements>
-    <a:clrScheme name="Simple Light">
+    <a:clrScheme name="Default">
       <a:dk1>
         <a:srgbClr val="000000"/>
       </a:dk1>
@@ -16561,34 +16670,34 @@
         <a:srgbClr val="FFFFFF"/>
       </a:lt1>
       <a:dk2>
-        <a:srgbClr val="595959"/>
+        <a:srgbClr val="158158"/>
       </a:dk2>
       <a:lt2>
-        <a:srgbClr val="EEEEEE"/>
+        <a:srgbClr val="F3F3F3"/>
       </a:lt2>
       <a:accent1>
-        <a:srgbClr val="4285F4"/>
+        <a:srgbClr val="058DC7"/>
       </a:accent1>
       <a:accent2>
-        <a:srgbClr val="212121"/>
+        <a:srgbClr val="50B432"/>
       </a:accent2>
       <a:accent3>
-        <a:srgbClr val="78909C"/>
+        <a:srgbClr val="ED561B"/>
       </a:accent3>
       <a:accent4>
-        <a:srgbClr val="FFAB40"/>
+        <a:srgbClr val="EDEF00"/>
       </a:accent4>
       <a:accent5>
-        <a:srgbClr val="0097A7"/>
+        <a:srgbClr val="24CBE5"/>
       </a:accent5>
       <a:accent6>
-        <a:srgbClr val="EEFF41"/>
+        <a:srgbClr val="64E572"/>
       </a:accent6>
       <a:hlink>
-        <a:srgbClr val="0097A7"/>
+        <a:srgbClr val="2200CC"/>
       </a:hlink>
       <a:folHlink>
-        <a:srgbClr val="0097A7"/>
+        <a:srgbClr val="551A8B"/>
       </a:folHlink>
     </a:clrScheme>
     <a:fontScheme name="Office">

--- a/docs/milestone_5/Milestone_5_Presentation.pptx
+++ b/docs/milestone_5/Milestone_5_Presentation.pptx
@@ -18,23 +18,24 @@
     <p:sldId id="262" r:id="rId14"/>
     <p:sldId id="263" r:id="rId15"/>
     <p:sldId id="264" r:id="rId16"/>
+    <p:sldId id="265" r:id="rId17"/>
   </p:sldIdLst>
   <p:sldSz cy="5143500" cx="9144000"/>
   <p:notesSz cx="6858000" cy="9144000"/>
   <p:embeddedFontLst>
     <p:embeddedFont>
       <p:font typeface="Economica"/>
-      <p:regular r:id="rId17"/>
-      <p:bold r:id="rId18"/>
-      <p:italic r:id="rId19"/>
-      <p:boldItalic r:id="rId20"/>
+      <p:regular r:id="rId18"/>
+      <p:bold r:id="rId19"/>
+      <p:italic r:id="rId20"/>
+      <p:boldItalic r:id="rId21"/>
     </p:embeddedFont>
     <p:embeddedFont>
       <p:font typeface="Open Sans"/>
-      <p:regular r:id="rId21"/>
-      <p:bold r:id="rId22"/>
-      <p:italic r:id="rId23"/>
-      <p:boldItalic r:id="rId24"/>
+      <p:regular r:id="rId22"/>
+      <p:bold r:id="rId23"/>
+      <p:italic r:id="rId24"/>
+      <p:boldItalic r:id="rId25"/>
     </p:embeddedFont>
   </p:embeddedFontLst>
   <p:defaultTextStyle>
@@ -810,6 +811,105 @@
 </p:notes>
 </file>
 
+<file path=ppt/notesSlides/notesSlide10.xml><?xml version="1.0" encoding="utf-8"?>
+<p:notes xmlns:a="http://schemas.openxmlformats.org/drawingml/2006/main" xmlns:r="http://schemas.openxmlformats.org/officeDocument/2006/relationships" xmlns:mc="http://schemas.openxmlformats.org/markup-compatibility/2006" xmlns:mv="urn:schemas-microsoft-com:mac:vml" xmlns:p="http://schemas.openxmlformats.org/presentationml/2006/main" xmlns:c="http://schemas.openxmlformats.org/drawingml/2006/chart" xmlns:dgm="http://schemas.openxmlformats.org/drawingml/2006/diagram" xmlns:o="urn:schemas-microsoft-com:office:office" xmlns:v="urn:schemas-microsoft-com:vml" xmlns:pvml="urn:schemas-microsoft-com:office:powerpoint" xmlns:com="http://schemas.openxmlformats.org/drawingml/2006/compatibility" xmlns:p14="http://schemas.microsoft.com/office/powerpoint/2010/main" xmlns:p15="http://schemas.microsoft.com/office/powerpoint/2012/main" xmlns:ahyp="http://schemas.microsoft.com/office/drawing/2018/hyperlinkcolor" showMasterPhAnim="0" showMasterSp="0">
+  <p:cSld>
+    <p:spTree>
+      <p:nvGrpSpPr>
+        <p:cNvPr id="157" name="Shape 157"/>
+        <p:cNvGrpSpPr/>
+        <p:nvPr/>
+      </p:nvGrpSpPr>
+      <p:grpSpPr>
+        <a:xfrm>
+          <a:off x="0" y="0"/>
+          <a:ext cx="0" cy="0"/>
+          <a:chOff x="0" y="0"/>
+          <a:chExt cx="0" cy="0"/>
+        </a:xfrm>
+      </p:grpSpPr>
+      <p:sp>
+        <p:nvSpPr>
+          <p:cNvPr id="158" name="Google Shape;158;h464d6e54cce73a76_0_174:notes"/>
+          <p:cNvSpPr/>
+          <p:nvPr>
+            <p:ph idx="2" type="sldImg"/>
+          </p:nvPr>
+        </p:nvSpPr>
+        <p:spPr>
+          <a:xfrm>
+            <a:off x="381300" y="685800"/>
+            <a:ext cx="6096000" cy="3429000"/>
+          </a:xfrm>
+          <a:custGeom>
+            <a:rect b="b" l="l" r="r" t="t"/>
+            <a:pathLst>
+              <a:path extrusionOk="0" h="120000" w="120000">
+                <a:moveTo>
+                  <a:pt x="0" y="0"/>
+                </a:moveTo>
+                <a:lnTo>
+                  <a:pt x="120000" y="0"/>
+                </a:lnTo>
+                <a:lnTo>
+                  <a:pt x="120000" y="120000"/>
+                </a:lnTo>
+                <a:lnTo>
+                  <a:pt x="0" y="120000"/>
+                </a:lnTo>
+                <a:close/>
+              </a:path>
+            </a:pathLst>
+          </a:custGeom>
+        </p:spPr>
+      </p:sp>
+      <p:sp>
+        <p:nvSpPr>
+          <p:cNvPr id="159" name="Google Shape;159;h464d6e54cce73a76_0_174:notes"/>
+          <p:cNvSpPr txBox="1"/>
+          <p:nvPr>
+            <p:ph idx="1" type="body"/>
+          </p:nvPr>
+        </p:nvSpPr>
+        <p:spPr>
+          <a:xfrm>
+            <a:off x="685800" y="4343400"/>
+            <a:ext cx="5486400" cy="4114800"/>
+          </a:xfrm>
+          <a:prstGeom prst="rect">
+            <a:avLst/>
+          </a:prstGeom>
+        </p:spPr>
+        <p:txBody>
+          <a:bodyPr anchorCtr="0" anchor="t" bIns="91425" lIns="91425" spcFirstLastPara="1" rIns="91425" wrap="square" tIns="91425">
+            <a:noAutofit/>
+          </a:bodyPr>
+          <a:lstStyle/>
+          <a:p>
+            <a:pPr indent="0" lvl="0" marL="0" rtl="0" algn="l">
+              <a:spcBef>
+                <a:spcPts val="0"/>
+              </a:spcBef>
+              <a:spcAft>
+                <a:spcPts val="0"/>
+              </a:spcAft>
+              <a:buNone/>
+            </a:pPr>
+            <a:r>
+              <a:t/>
+            </a:r>
+            <a:endParaRPr/>
+          </a:p>
+        </p:txBody>
+      </p:sp>
+    </p:spTree>
+  </p:cSld>
+  <p:clrMapOvr>
+    <a:masterClrMapping/>
+  </p:clrMapOvr>
+</p:notes>
+</file>
+
 <file path=ppt/notesSlides/notesSlide2.xml><?xml version="1.0" encoding="utf-8"?>
 <p:notes xmlns:a="http://schemas.openxmlformats.org/drawingml/2006/main" xmlns:r="http://schemas.openxmlformats.org/officeDocument/2006/relationships" xmlns:mc="http://schemas.openxmlformats.org/markup-compatibility/2006" xmlns:mv="urn:schemas-microsoft-com:mac:vml" xmlns:p="http://schemas.openxmlformats.org/presentationml/2006/main" xmlns:c="http://schemas.openxmlformats.org/drawingml/2006/chart" xmlns:dgm="http://schemas.openxmlformats.org/drawingml/2006/diagram" xmlns:o="urn:schemas-microsoft-com:office:office" xmlns:v="urn:schemas-microsoft-com:vml" xmlns:pvml="urn:schemas-microsoft-com:office:powerpoint" xmlns:com="http://schemas.openxmlformats.org/drawingml/2006/compatibility" xmlns:p14="http://schemas.microsoft.com/office/powerpoint/2010/main" xmlns:p15="http://schemas.microsoft.com/office/powerpoint/2012/main" xmlns:ahyp="http://schemas.microsoft.com/office/drawing/2018/hyperlinkcolor" showMasterPhAnim="0" showMasterSp="0">
   <p:cSld>
@@ -1438,7 +1538,7 @@
       </p:grpSpPr>
       <p:sp>
         <p:nvSpPr>
-          <p:cNvPr id="140" name="Google Shape;140;h464d6e54cce73a76_0_236:notes"/>
+          <p:cNvPr id="140" name="Google Shape;140;h4692d06a5b27e806_0_0:notes"/>
           <p:cNvSpPr/>
           <p:nvPr>
             <p:ph idx="2" type="sldImg"/>
@@ -1473,7 +1573,7 @@
       </p:sp>
       <p:sp>
         <p:nvSpPr>
-          <p:cNvPr id="141" name="Google Shape;141;h464d6e54cce73a76_0_236:notes"/>
+          <p:cNvPr id="141" name="Google Shape;141;h4692d06a5b27e806_0_0:notes"/>
           <p:cNvSpPr txBox="1"/>
           <p:nvPr>
             <p:ph idx="1" type="body"/>
@@ -1494,41 +1594,9 @@
           </a:bodyPr>
           <a:lstStyle/>
           <a:p>
-            <a:pPr indent="0" lvl="0" marL="457200" rtl="0" algn="l">
-              <a:lnSpc>
-                <a:spcPct val="115000"/>
-              </a:lnSpc>
-              <a:spcBef>
-                <a:spcPts val="0"/>
-              </a:spcBef>
-              <a:spcAft>
-                <a:spcPts val="0"/>
-              </a:spcAft>
-              <a:buNone/>
-            </a:pPr>
-            <a:r>
-              <a:rPr lang="en" sz="1000">
-                <a:latin typeface="Times New Roman"/>
-                <a:ea typeface="Times New Roman"/>
-                <a:cs typeface="Times New Roman"/>
-                <a:sym typeface="Times New Roman"/>
-              </a:rPr>
-              <a:t>Completion and member percentages reproduce the evaluation. Task 2 reflects entropy/research supporting work, with NIST-approved PQC integration unfinished.</a:t>
-            </a:r>
-            <a:endParaRPr sz="1000">
-              <a:latin typeface="Times New Roman"/>
-              <a:ea typeface="Times New Roman"/>
-              <a:cs typeface="Times New Roman"/>
-              <a:sym typeface="Times New Roman"/>
-            </a:endParaRPr>
-          </a:p>
-          <a:p>
-            <a:pPr indent="0" lvl="0" marL="457200" rtl="0" algn="l">
-              <a:lnSpc>
-                <a:spcPct val="115000"/>
-              </a:lnSpc>
-              <a:spcBef>
-                <a:spcPts val="1200"/>
+            <a:pPr indent="0" lvl="0" marL="0" rtl="0" algn="l">
+              <a:spcBef>
+                <a:spcPts val="0"/>
               </a:spcBef>
               <a:spcAft>
                 <a:spcPts val="0"/>
@@ -1538,93 +1606,7 @@
             <a:r>
               <a:t/>
             </a:r>
-            <a:endParaRPr sz="1000">
-              <a:latin typeface="Times New Roman"/>
-              <a:ea typeface="Times New Roman"/>
-              <a:cs typeface="Times New Roman"/>
-              <a:sym typeface="Times New Roman"/>
-            </a:endParaRPr>
-          </a:p>
-          <a:p>
-            <a:pPr indent="0" lvl="0" marL="457200" rtl="0" algn="l">
-              <a:lnSpc>
-                <a:spcPct val="115000"/>
-              </a:lnSpc>
-              <a:spcBef>
-                <a:spcPts val="1200"/>
-              </a:spcBef>
-              <a:spcAft>
-                <a:spcPts val="0"/>
-              </a:spcAft>
-              <a:buNone/>
-            </a:pPr>
-            <a:r>
-              <a:rPr lang="en" sz="1000">
-                <a:latin typeface="Times New Roman"/>
-                <a:ea typeface="Times New Roman"/>
-                <a:cs typeface="Times New Roman"/>
-                <a:sym typeface="Times New Roman"/>
-              </a:rPr>
-              <a:t>Source: Milestone 5 Progress Evaluation (October 26, 2026)</a:t>
-            </a:r>
-            <a:endParaRPr sz="1000">
-              <a:latin typeface="Times New Roman"/>
-              <a:ea typeface="Times New Roman"/>
-              <a:cs typeface="Times New Roman"/>
-              <a:sym typeface="Times New Roman"/>
-            </a:endParaRPr>
-          </a:p>
-          <a:p>
-            <a:pPr indent="0" lvl="0" marL="457200" rtl="0" algn="l">
-              <a:lnSpc>
-                <a:spcPct val="115000"/>
-              </a:lnSpc>
-              <a:spcBef>
-                <a:spcPts val="1200"/>
-              </a:spcBef>
-              <a:spcAft>
-                <a:spcPts val="0"/>
-              </a:spcAft>
-              <a:buNone/>
-            </a:pPr>
-            <a:r>
-              <a:rPr lang="en" sz="1000">
-                <a:latin typeface="Times New Roman"/>
-                <a:ea typeface="Times New Roman"/>
-                <a:cs typeface="Times New Roman"/>
-                <a:sym typeface="Times New Roman"/>
-              </a:rPr>
-              <a:t>https://docs.google.com/document/d/1diCN2Wz454ztZ5JlQbeVHX785ENQ_TKF3QcP85OhsRQ/edit</a:t>
-            </a:r>
-            <a:endParaRPr sz="1000">
-              <a:latin typeface="Times New Roman"/>
-              <a:ea typeface="Times New Roman"/>
-              <a:cs typeface="Times New Roman"/>
-              <a:sym typeface="Times New Roman"/>
-            </a:endParaRPr>
-          </a:p>
-          <a:p>
-            <a:pPr indent="0" lvl="0" marL="457200" rtl="0" algn="l">
-              <a:lnSpc>
-                <a:spcPct val="115000"/>
-              </a:lnSpc>
-              <a:spcBef>
-                <a:spcPts val="1200"/>
-              </a:spcBef>
-              <a:spcAft>
-                <a:spcPts val="1200"/>
-              </a:spcAft>
-              <a:buNone/>
-            </a:pPr>
-            <a:r>
-              <a:t/>
-            </a:r>
-            <a:endParaRPr sz="1000">
-              <a:latin typeface="Times New Roman"/>
-              <a:ea typeface="Times New Roman"/>
-              <a:cs typeface="Times New Roman"/>
-              <a:sym typeface="Times New Roman"/>
-            </a:endParaRPr>
+            <a:endParaRPr/>
           </a:p>
         </p:txBody>
       </p:sp>
@@ -1655,7 +1637,7 @@
       </p:grpSpPr>
       <p:sp>
         <p:nvSpPr>
-          <p:cNvPr id="146" name="Google Shape;146;h7b5cbd2fa13e1131_0_3:notes"/>
+          <p:cNvPr id="146" name="Google Shape;146;h464d6e54cce73a76_0_236:notes"/>
           <p:cNvSpPr/>
           <p:nvPr>
             <p:ph idx="2" type="sldImg"/>
@@ -1690,7 +1672,7 @@
       </p:sp>
       <p:sp>
         <p:nvSpPr>
-          <p:cNvPr id="147" name="Google Shape;147;h7b5cbd2fa13e1131_0_3:notes"/>
+          <p:cNvPr id="147" name="Google Shape;147;h464d6e54cce73a76_0_236:notes"/>
           <p:cNvSpPr txBox="1"/>
           <p:nvPr>
             <p:ph idx="1" type="body"/>
@@ -1730,7 +1712,7 @@
                 <a:cs typeface="Times New Roman"/>
                 <a:sym typeface="Times New Roman"/>
               </a:rPr>
-              <a:t>All four next-milestone assignments reproduce the evaluation. Acceptance includes authentication/role tests, PQC interoperability, reproducible assessment and stated entropy assumptions, sustained Pi reliability and load/latency measurements, DB security verification, and an end-to-end demo using the guide.</a:t>
+              <a:t>Completion and member percentages reproduce the evaluation. Task 2 reflects entropy/research supporting work, with NIST-approved PQC integration unfinished.</a:t>
             </a:r>
             <a:endParaRPr sz="1000">
               <a:latin typeface="Times New Roman"/>
@@ -1872,7 +1854,7 @@
       </p:grpSpPr>
       <p:sp>
         <p:nvSpPr>
-          <p:cNvPr id="152" name="Google Shape;152;h464d6e54cce73a76_0_174:notes"/>
+          <p:cNvPr id="152" name="Google Shape;152;h7b5cbd2fa13e1131_0_3:notes"/>
           <p:cNvSpPr/>
           <p:nvPr>
             <p:ph idx="2" type="sldImg"/>
@@ -1907,7 +1889,7 @@
       </p:sp>
       <p:sp>
         <p:nvSpPr>
-          <p:cNvPr id="153" name="Google Shape;153;h464d6e54cce73a76_0_174:notes"/>
+          <p:cNvPr id="153" name="Google Shape;153;h7b5cbd2fa13e1131_0_3:notes"/>
           <p:cNvSpPr txBox="1"/>
           <p:nvPr>
             <p:ph idx="1" type="body"/>
@@ -1928,9 +1910,41 @@
           </a:bodyPr>
           <a:lstStyle/>
           <a:p>
-            <a:pPr indent="0" lvl="0" marL="0" rtl="0" algn="l">
-              <a:spcBef>
-                <a:spcPts val="0"/>
+            <a:pPr indent="0" lvl="0" marL="457200" rtl="0" algn="l">
+              <a:lnSpc>
+                <a:spcPct val="115000"/>
+              </a:lnSpc>
+              <a:spcBef>
+                <a:spcPts val="0"/>
+              </a:spcBef>
+              <a:spcAft>
+                <a:spcPts val="0"/>
+              </a:spcAft>
+              <a:buNone/>
+            </a:pPr>
+            <a:r>
+              <a:rPr lang="en" sz="1000">
+                <a:latin typeface="Times New Roman"/>
+                <a:ea typeface="Times New Roman"/>
+                <a:cs typeface="Times New Roman"/>
+                <a:sym typeface="Times New Roman"/>
+              </a:rPr>
+              <a:t>All four next-milestone assignments reproduce the evaluation. Acceptance includes authentication/role tests, PQC interoperability, reproducible assessment and stated entropy assumptions, sustained Pi reliability and load/latency measurements, DB security verification, and an end-to-end demo using the guide.</a:t>
+            </a:r>
+            <a:endParaRPr sz="1000">
+              <a:latin typeface="Times New Roman"/>
+              <a:ea typeface="Times New Roman"/>
+              <a:cs typeface="Times New Roman"/>
+              <a:sym typeface="Times New Roman"/>
+            </a:endParaRPr>
+          </a:p>
+          <a:p>
+            <a:pPr indent="0" lvl="0" marL="457200" rtl="0" algn="l">
+              <a:lnSpc>
+                <a:spcPct val="115000"/>
+              </a:lnSpc>
+              <a:spcBef>
+                <a:spcPts val="1200"/>
               </a:spcBef>
               <a:spcAft>
                 <a:spcPts val="0"/>
@@ -1940,7 +1954,93 @@
             <a:r>
               <a:t/>
             </a:r>
-            <a:endParaRPr/>
+            <a:endParaRPr sz="1000">
+              <a:latin typeface="Times New Roman"/>
+              <a:ea typeface="Times New Roman"/>
+              <a:cs typeface="Times New Roman"/>
+              <a:sym typeface="Times New Roman"/>
+            </a:endParaRPr>
+          </a:p>
+          <a:p>
+            <a:pPr indent="0" lvl="0" marL="457200" rtl="0" algn="l">
+              <a:lnSpc>
+                <a:spcPct val="115000"/>
+              </a:lnSpc>
+              <a:spcBef>
+                <a:spcPts val="1200"/>
+              </a:spcBef>
+              <a:spcAft>
+                <a:spcPts val="0"/>
+              </a:spcAft>
+              <a:buNone/>
+            </a:pPr>
+            <a:r>
+              <a:rPr lang="en" sz="1000">
+                <a:latin typeface="Times New Roman"/>
+                <a:ea typeface="Times New Roman"/>
+                <a:cs typeface="Times New Roman"/>
+                <a:sym typeface="Times New Roman"/>
+              </a:rPr>
+              <a:t>Source: Milestone 5 Progress Evaluation (October 26, 2026)</a:t>
+            </a:r>
+            <a:endParaRPr sz="1000">
+              <a:latin typeface="Times New Roman"/>
+              <a:ea typeface="Times New Roman"/>
+              <a:cs typeface="Times New Roman"/>
+              <a:sym typeface="Times New Roman"/>
+            </a:endParaRPr>
+          </a:p>
+          <a:p>
+            <a:pPr indent="0" lvl="0" marL="457200" rtl="0" algn="l">
+              <a:lnSpc>
+                <a:spcPct val="115000"/>
+              </a:lnSpc>
+              <a:spcBef>
+                <a:spcPts val="1200"/>
+              </a:spcBef>
+              <a:spcAft>
+                <a:spcPts val="0"/>
+              </a:spcAft>
+              <a:buNone/>
+            </a:pPr>
+            <a:r>
+              <a:rPr lang="en" sz="1000">
+                <a:latin typeface="Times New Roman"/>
+                <a:ea typeface="Times New Roman"/>
+                <a:cs typeface="Times New Roman"/>
+                <a:sym typeface="Times New Roman"/>
+              </a:rPr>
+              <a:t>https://docs.google.com/document/d/1diCN2Wz454ztZ5JlQbeVHX785ENQ_TKF3QcP85OhsRQ/edit</a:t>
+            </a:r>
+            <a:endParaRPr sz="1000">
+              <a:latin typeface="Times New Roman"/>
+              <a:ea typeface="Times New Roman"/>
+              <a:cs typeface="Times New Roman"/>
+              <a:sym typeface="Times New Roman"/>
+            </a:endParaRPr>
+          </a:p>
+          <a:p>
+            <a:pPr indent="0" lvl="0" marL="457200" rtl="0" algn="l">
+              <a:lnSpc>
+                <a:spcPct val="115000"/>
+              </a:lnSpc>
+              <a:spcBef>
+                <a:spcPts val="1200"/>
+              </a:spcBef>
+              <a:spcAft>
+                <a:spcPts val="1200"/>
+              </a:spcAft>
+              <a:buNone/>
+            </a:pPr>
+            <a:r>
+              <a:t/>
+            </a:r>
+            <a:endParaRPr sz="1000">
+              <a:latin typeface="Times New Roman"/>
+              <a:ea typeface="Times New Roman"/>
+              <a:cs typeface="Times New Roman"/>
+              <a:sym typeface="Times New Roman"/>
+            </a:endParaRPr>
           </a:p>
         </p:txBody>
       </p:sp>
@@ -12290,6 +12390,71 @@
 </p:sld>
 </file>
 
+<file path=ppt/slides/slide10.xml><?xml version="1.0" encoding="utf-8"?>
+<p:sld xmlns:a="http://schemas.openxmlformats.org/drawingml/2006/main" xmlns:r="http://schemas.openxmlformats.org/officeDocument/2006/relationships" xmlns:mc="http://schemas.openxmlformats.org/markup-compatibility/2006" xmlns:mv="urn:schemas-microsoft-com:mac:vml" xmlns:p="http://schemas.openxmlformats.org/presentationml/2006/main" xmlns:c="http://schemas.openxmlformats.org/drawingml/2006/chart" xmlns:dgm="http://schemas.openxmlformats.org/drawingml/2006/diagram" xmlns:o="urn:schemas-microsoft-com:office:office" xmlns:v="urn:schemas-microsoft-com:vml" xmlns:pvml="urn:schemas-microsoft-com:office:powerpoint" xmlns:com="http://schemas.openxmlformats.org/drawingml/2006/compatibility" xmlns:p14="http://schemas.microsoft.com/office/powerpoint/2010/main" xmlns:p15="http://schemas.microsoft.com/office/powerpoint/2012/main" xmlns:ahyp="http://schemas.microsoft.com/office/drawing/2018/hyperlinkcolor">
+  <p:cSld>
+    <p:spTree>
+      <p:nvGrpSpPr>
+        <p:cNvPr id="160" name="Shape 160"/>
+        <p:cNvGrpSpPr/>
+        <p:nvPr/>
+      </p:nvGrpSpPr>
+      <p:grpSpPr>
+        <a:xfrm>
+          <a:off x="0" y="0"/>
+          <a:ext cx="0" cy="0"/>
+          <a:chOff x="0" y="0"/>
+          <a:chExt cx="0" cy="0"/>
+        </a:xfrm>
+      </p:grpSpPr>
+      <p:sp>
+        <p:nvSpPr>
+          <p:cNvPr id="161" name="Google Shape;161;p34"/>
+          <p:cNvSpPr txBox="1"/>
+          <p:nvPr>
+            <p:ph type="title"/>
+          </p:nvPr>
+        </p:nvSpPr>
+        <p:spPr>
+          <a:xfrm>
+            <a:off x="773700" y="1806450"/>
+            <a:ext cx="7596600" cy="1530600"/>
+          </a:xfrm>
+          <a:prstGeom prst="rect">
+            <a:avLst/>
+          </a:prstGeom>
+        </p:spPr>
+        <p:txBody>
+          <a:bodyPr anchorCtr="0" anchor="ctr" bIns="91425" lIns="91425" spcFirstLastPara="1" rIns="91425" wrap="square" tIns="91425">
+            <a:normAutofit/>
+          </a:bodyPr>
+          <a:lstStyle/>
+          <a:p>
+            <a:pPr indent="0" lvl="0" marL="0" rtl="0" algn="ctr">
+              <a:spcBef>
+                <a:spcPts val="0"/>
+              </a:spcBef>
+              <a:spcAft>
+                <a:spcPts val="0"/>
+              </a:spcAft>
+              <a:buNone/>
+            </a:pPr>
+            <a:r>
+              <a:rPr lang="en"/>
+              <a:t>Thank you for your attention.</a:t>
+            </a:r>
+            <a:endParaRPr/>
+          </a:p>
+        </p:txBody>
+      </p:sp>
+    </p:spTree>
+  </p:cSld>
+  <p:clrMapOvr>
+    <a:masterClrMapping/>
+  </p:clrMapOvr>
+</p:sld>
+</file>
+
 <file path=ppt/slides/slide2.xml><?xml version="1.0" encoding="utf-8"?>
 <p:sld xmlns:a="http://schemas.openxmlformats.org/drawingml/2006/main" xmlns:r="http://schemas.openxmlformats.org/officeDocument/2006/relationships" xmlns:mc="http://schemas.openxmlformats.org/markup-compatibility/2006" xmlns:mv="urn:schemas-microsoft-com:mac:vml" xmlns:p="http://schemas.openxmlformats.org/presentationml/2006/main" xmlns:c="http://schemas.openxmlformats.org/drawingml/2006/chart" xmlns:dgm="http://schemas.openxmlformats.org/drawingml/2006/diagram" xmlns:o="urn:schemas-microsoft-com:office:office" xmlns:v="urn:schemas-microsoft-com:vml" xmlns:pvml="urn:schemas-microsoft-com:office:powerpoint" xmlns:com="http://schemas.openxmlformats.org/drawingml/2006/compatibility" xmlns:p14="http://schemas.microsoft.com/office/powerpoint/2010/main" xmlns:p15="http://schemas.microsoft.com/office/powerpoint/2012/main" xmlns:ahyp="http://schemas.microsoft.com/office/drawing/2018/hyperlinkcolor">
   <p:cSld>
@@ -13006,6 +13171,184 @@
             </a:pPr>
             <a:r>
               <a:rPr lang="en"/>
+              <a:t>demo</a:t>
+            </a:r>
+            <a:endParaRPr/>
+          </a:p>
+        </p:txBody>
+      </p:sp>
+      <p:pic>
+        <p:nvPicPr>
+          <p:cNvPr id="144" name="Google Shape;144;p31" title="Screen Recording 2026-10-26 at 3.10.36 PM.mp4">
+            <a:hlinkClick r:id="rId3"/>
+          </p:cNvPr>
+          <p:cNvPicPr preferRelativeResize="0"/>
+          <p:nvPr/>
+        </p:nvPicPr>
+        <p:blipFill>
+          <a:blip r:embed="rId4">
+            <a:alphaModFix/>
+          </a:blip>
+          <a:stretch>
+            <a:fillRect/>
+          </a:stretch>
+        </p:blipFill>
+        <p:spPr>
+          <a:xfrm>
+            <a:off x="2286000" y="1321050"/>
+            <a:ext cx="4572000" cy="3429000"/>
+          </a:xfrm>
+          <a:prstGeom prst="rect">
+            <a:avLst/>
+          </a:prstGeom>
+          <a:noFill/>
+          <a:ln>
+            <a:noFill/>
+          </a:ln>
+        </p:spPr>
+      </p:pic>
+    </p:spTree>
+  </p:cSld>
+  <p:clrMapOvr>
+    <a:masterClrMapping/>
+  </p:clrMapOvr>
+  <p:timing>
+    <p:tnLst>
+      <p:par>
+        <p:cTn dur="indefinite" nodeType="tmRoot" restart="never">
+          <p:childTnLst>
+            <p:seq concurrent="1" nextAc="seek">
+              <p:cTn dur="indefinite" id="2" nodeType="mainSeq">
+                <p:childTnLst>
+                  <p:par>
+                    <p:cTn fill="hold">
+                      <p:stCondLst>
+                        <p:cond delay="indefinite"/>
+                      </p:stCondLst>
+                      <p:childTnLst>
+                        <p:par>
+                          <p:cTn fill="hold">
+                            <p:stCondLst>
+                              <p:cond delay="0"/>
+                            </p:stCondLst>
+                            <p:childTnLst>
+                              <p:par>
+                                <p:cTn fill="hold" nodeType="clickEffect" presetClass="entr" presetID="10" presetSubtype="0">
+                                  <p:stCondLst>
+                                    <p:cond delay="0"/>
+                                  </p:stCondLst>
+                                  <p:childTnLst>
+                                    <p:set>
+                                      <p:cBhvr>
+                                        <p:cTn dur="1" fill="hold">
+                                          <p:stCondLst>
+                                            <p:cond delay="0"/>
+                                          </p:stCondLst>
+                                        </p:cTn>
+                                        <p:tgtEl>
+                                          <p:spTgt spid="144"/>
+                                        </p:tgtEl>
+                                        <p:attrNameLst>
+                                          <p:attrName>style.visibility</p:attrName>
+                                        </p:attrNameLst>
+                                      </p:cBhvr>
+                                      <p:to>
+                                        <p:strVal val="visible"/>
+                                      </p:to>
+                                    </p:set>
+                                    <p:animEffect filter="fade" transition="in">
+                                      <p:cBhvr>
+                                        <p:cTn dur="1000"/>
+                                        <p:tgtEl>
+                                          <p:spTgt spid="144"/>
+                                        </p:tgtEl>
+                                      </p:cBhvr>
+                                    </p:animEffect>
+                                  </p:childTnLst>
+                                </p:cTn>
+                              </p:par>
+                            </p:childTnLst>
+                          </p:cTn>
+                        </p:par>
+                      </p:childTnLst>
+                    </p:cTn>
+                  </p:par>
+                </p:childTnLst>
+              </p:cTn>
+              <p:prevCondLst>
+                <p:cond evt="onPrev">
+                  <p:tgtEl>
+                    <p:sldTgt/>
+                  </p:tgtEl>
+                </p:cond>
+              </p:prevCondLst>
+              <p:nextCondLst>
+                <p:cond evt="onNext">
+                  <p:tgtEl>
+                    <p:sldTgt/>
+                  </p:tgtEl>
+                </p:cond>
+              </p:nextCondLst>
+            </p:seq>
+          </p:childTnLst>
+        </p:cTn>
+      </p:par>
+    </p:tnLst>
+  </p:timing>
+</p:sld>
+</file>
+
+<file path=ppt/slides/slide8.xml><?xml version="1.0" encoding="utf-8"?>
+<p:sld xmlns:a="http://schemas.openxmlformats.org/drawingml/2006/main" xmlns:r="http://schemas.openxmlformats.org/officeDocument/2006/relationships" xmlns:mc="http://schemas.openxmlformats.org/markup-compatibility/2006" xmlns:mv="urn:schemas-microsoft-com:mac:vml" xmlns:p="http://schemas.openxmlformats.org/presentationml/2006/main" xmlns:c="http://schemas.openxmlformats.org/drawingml/2006/chart" xmlns:dgm="http://schemas.openxmlformats.org/drawingml/2006/diagram" xmlns:o="urn:schemas-microsoft-com:office:office" xmlns:v="urn:schemas-microsoft-com:vml" xmlns:pvml="urn:schemas-microsoft-com:office:powerpoint" xmlns:com="http://schemas.openxmlformats.org/drawingml/2006/compatibility" xmlns:p14="http://schemas.microsoft.com/office/powerpoint/2010/main" xmlns:p15="http://schemas.microsoft.com/office/powerpoint/2012/main" xmlns:ahyp="http://schemas.microsoft.com/office/drawing/2018/hyperlinkcolor">
+  <p:cSld>
+    <p:spTree>
+      <p:nvGrpSpPr>
+        <p:cNvPr id="148" name="Shape 148"/>
+        <p:cNvGrpSpPr/>
+        <p:nvPr/>
+      </p:nvGrpSpPr>
+      <p:grpSpPr>
+        <a:xfrm>
+          <a:off x="0" y="0"/>
+          <a:ext cx="0" cy="0"/>
+          <a:chOff x="0" y="0"/>
+          <a:chExt cx="0" cy="0"/>
+        </a:xfrm>
+      </p:grpSpPr>
+      <p:sp>
+        <p:nvSpPr>
+          <p:cNvPr id="149" name="Google Shape;149;p32"/>
+          <p:cNvSpPr txBox="1"/>
+          <p:nvPr>
+            <p:ph type="title"/>
+          </p:nvPr>
+        </p:nvSpPr>
+        <p:spPr>
+          <a:xfrm>
+            <a:off x="311700" y="315925"/>
+            <a:ext cx="8520600" cy="831300"/>
+          </a:xfrm>
+          <a:prstGeom prst="rect">
+            <a:avLst/>
+          </a:prstGeom>
+        </p:spPr>
+        <p:txBody>
+          <a:bodyPr anchorCtr="0" anchor="b" bIns="91425" lIns="91425" spcFirstLastPara="1" rIns="91425" wrap="square" tIns="91425">
+            <a:normAutofit/>
+          </a:bodyPr>
+          <a:lstStyle/>
+          <a:p>
+            <a:pPr indent="0" lvl="0" marL="0" rtl="0" algn="l">
+              <a:spcBef>
+                <a:spcPts val="0"/>
+              </a:spcBef>
+              <a:spcAft>
+                <a:spcPts val="0"/>
+              </a:spcAft>
+              <a:buNone/>
+            </a:pPr>
+            <a:r>
+              <a:rPr lang="en"/>
               <a:t>Milestone 5 Matrix</a:t>
             </a:r>
             <a:endParaRPr/>
@@ -13014,7 +13357,7 @@
       </p:sp>
       <p:graphicFrame>
         <p:nvGraphicFramePr>
-          <p:cNvPr id="144" name="Google Shape;144;p31"/>
+          <p:cNvPr id="150" name="Google Shape;150;p32"/>
           <p:cNvGraphicFramePr/>
           <p:nvPr/>
         </p:nvGraphicFramePr>
@@ -13027,7 +13370,7 @@
             <a:tbl>
               <a:tblPr>
                 <a:noFill/>
-                <a:tableStyleId>{236F04E9-5020-487C-B299-A11F27DC5553}</a:tableStyleId>
+                <a:tableStyleId>{C09C7D6E-6C9F-45B6-A404-FF49D0E07950}</a:tableStyleId>
               </a:tblPr>
               <a:tblGrid>
                 <a:gridCol w="2286000"/>
@@ -14534,12 +14877,12 @@
 </p:sld>
 </file>
 
-<file path=ppt/slides/slide8.xml><?xml version="1.0" encoding="utf-8"?>
+<file path=ppt/slides/slide9.xml><?xml version="1.0" encoding="utf-8"?>
 <p:sld xmlns:a="http://schemas.openxmlformats.org/drawingml/2006/main" xmlns:r="http://schemas.openxmlformats.org/officeDocument/2006/relationships" xmlns:mc="http://schemas.openxmlformats.org/markup-compatibility/2006" xmlns:mv="urn:schemas-microsoft-com:mac:vml" xmlns:p="http://schemas.openxmlformats.org/presentationml/2006/main" xmlns:c="http://schemas.openxmlformats.org/drawingml/2006/chart" xmlns:dgm="http://schemas.openxmlformats.org/drawingml/2006/diagram" xmlns:o="urn:schemas-microsoft-com:office:office" xmlns:v="urn:schemas-microsoft-com:vml" xmlns:pvml="urn:schemas-microsoft-com:office:powerpoint" xmlns:com="http://schemas.openxmlformats.org/drawingml/2006/compatibility" xmlns:p14="http://schemas.microsoft.com/office/powerpoint/2010/main" xmlns:p15="http://schemas.microsoft.com/office/powerpoint/2012/main" xmlns:ahyp="http://schemas.microsoft.com/office/drawing/2018/hyperlinkcolor">
   <p:cSld>
     <p:spTree>
       <p:nvGrpSpPr>
-        <p:cNvPr id="148" name="Shape 148"/>
+        <p:cNvPr id="154" name="Shape 154"/>
         <p:cNvGrpSpPr/>
         <p:nvPr/>
       </p:nvGrpSpPr>
@@ -14553,7 +14896,7 @@
       </p:grpSpPr>
       <p:sp>
         <p:nvSpPr>
-          <p:cNvPr id="149" name="Google Shape;149;p32"/>
+          <p:cNvPr id="155" name="Google Shape;155;p33"/>
           <p:cNvSpPr txBox="1"/>
           <p:nvPr>
             <p:ph type="title"/>
@@ -14593,7 +14936,7 @@
       </p:sp>
       <p:graphicFrame>
         <p:nvGraphicFramePr>
-          <p:cNvPr id="150" name="Google Shape;150;p32"/>
+          <p:cNvPr id="156" name="Google Shape;156;p33"/>
           <p:cNvGraphicFramePr/>
           <p:nvPr/>
         </p:nvGraphicFramePr>
@@ -14606,7 +14949,7 @@
             <a:tbl>
               <a:tblPr>
                 <a:noFill/>
-                <a:tableStyleId>{236F04E9-5020-487C-B299-A11F27DC5553}</a:tableStyleId>
+                <a:tableStyleId>{C09C7D6E-6C9F-45B6-A404-FF49D0E07950}</a:tableStyleId>
               </a:tblPr>
               <a:tblGrid>
                 <a:gridCol w="2921000"/>
@@ -16036,72 +16379,286 @@
 </p:sld>
 </file>
 
-<file path=ppt/slides/slide9.xml><?xml version="1.0" encoding="utf-8"?>
-<p:sld xmlns:a="http://schemas.openxmlformats.org/drawingml/2006/main" xmlns:r="http://schemas.openxmlformats.org/officeDocument/2006/relationships" xmlns:mc="http://schemas.openxmlformats.org/markup-compatibility/2006" xmlns:mv="urn:schemas-microsoft-com:mac:vml" xmlns:p="http://schemas.openxmlformats.org/presentationml/2006/main" xmlns:c="http://schemas.openxmlformats.org/drawingml/2006/chart" xmlns:dgm="http://schemas.openxmlformats.org/drawingml/2006/diagram" xmlns:o="urn:schemas-microsoft-com:office:office" xmlns:v="urn:schemas-microsoft-com:vml" xmlns:pvml="urn:schemas-microsoft-com:office:powerpoint" xmlns:com="http://schemas.openxmlformats.org/drawingml/2006/compatibility" xmlns:p14="http://schemas.microsoft.com/office/powerpoint/2010/main" xmlns:p15="http://schemas.microsoft.com/office/powerpoint/2012/main" xmlns:ahyp="http://schemas.microsoft.com/office/drawing/2018/hyperlinkcolor">
-  <p:cSld>
-    <p:spTree>
-      <p:nvGrpSpPr>
-        <p:cNvPr id="154" name="Shape 154"/>
-        <p:cNvGrpSpPr/>
-        <p:nvPr/>
-      </p:nvGrpSpPr>
-      <p:grpSpPr>
-        <a:xfrm>
-          <a:off x="0" y="0"/>
-          <a:ext cx="0" cy="0"/>
-          <a:chOff x="0" y="0"/>
-          <a:chExt cx="0" cy="0"/>
-        </a:xfrm>
-      </p:grpSpPr>
-      <p:sp>
-        <p:nvSpPr>
-          <p:cNvPr id="155" name="Google Shape;155;p33"/>
-          <p:cNvSpPr txBox="1"/>
-          <p:nvPr>
-            <p:ph type="title"/>
-          </p:nvPr>
-        </p:nvSpPr>
-        <p:spPr>
-          <a:xfrm>
-            <a:off x="773700" y="1806450"/>
-            <a:ext cx="7596600" cy="1530600"/>
-          </a:xfrm>
-          <a:prstGeom prst="rect">
-            <a:avLst/>
-          </a:prstGeom>
-        </p:spPr>
-        <p:txBody>
-          <a:bodyPr anchorCtr="0" anchor="ctr" bIns="91425" lIns="91425" spcFirstLastPara="1" rIns="91425" wrap="square" tIns="91425">
-            <a:normAutofit/>
-          </a:bodyPr>
-          <a:lstStyle/>
-          <a:p>
-            <a:pPr indent="0" lvl="0" marL="0" rtl="0" algn="ctr">
-              <a:spcBef>
-                <a:spcPts val="0"/>
-              </a:spcBef>
-              <a:spcAft>
-                <a:spcPts val="0"/>
-              </a:spcAft>
-              <a:buNone/>
-            </a:pPr>
-            <a:r>
-              <a:rPr lang="en"/>
-              <a:t>Thank you for your attention.</a:t>
-            </a:r>
-            <a:endParaRPr/>
-          </a:p>
-        </p:txBody>
-      </p:sp>
-    </p:spTree>
-  </p:cSld>
-  <p:clrMapOvr>
-    <a:masterClrMapping/>
-  </p:clrMapOvr>
-</p:sld>
+<file path=ppt/theme/theme1.xml><?xml version="1.0" encoding="utf-8"?>
+<a:theme xmlns:a="http://schemas.openxmlformats.org/drawingml/2006/main" xmlns:r="http://schemas.openxmlformats.org/officeDocument/2006/relationships">
+  <a:themeElements>
+    <a:clrScheme name="Default">
+      <a:dk1>
+        <a:srgbClr val="000000"/>
+      </a:dk1>
+      <a:lt1>
+        <a:srgbClr val="FFFFFF"/>
+      </a:lt1>
+      <a:dk2>
+        <a:srgbClr val="158158"/>
+      </a:dk2>
+      <a:lt2>
+        <a:srgbClr val="F3F3F3"/>
+      </a:lt2>
+      <a:accent1>
+        <a:srgbClr val="058DC7"/>
+      </a:accent1>
+      <a:accent2>
+        <a:srgbClr val="50B432"/>
+      </a:accent2>
+      <a:accent3>
+        <a:srgbClr val="ED561B"/>
+      </a:accent3>
+      <a:accent4>
+        <a:srgbClr val="EDEF00"/>
+      </a:accent4>
+      <a:accent5>
+        <a:srgbClr val="24CBE5"/>
+      </a:accent5>
+      <a:accent6>
+        <a:srgbClr val="64E572"/>
+      </a:accent6>
+      <a:hlink>
+        <a:srgbClr val="2200CC"/>
+      </a:hlink>
+      <a:folHlink>
+        <a:srgbClr val="551A8B"/>
+      </a:folHlink>
+    </a:clrScheme>
+    <a:fontScheme name="Office">
+      <a:majorFont>
+        <a:latin typeface="Arial"/>
+        <a:ea typeface=""/>
+        <a:cs typeface=""/>
+        <a:font script="Jpan" typeface="ＭＳ Ｐゴシック"/>
+        <a:font script="Hang" typeface="맑은 고딕"/>
+        <a:font script="Hans" typeface="宋体"/>
+        <a:font script="Hant" typeface="新細明體"/>
+        <a:font script="Arab" typeface="Times New Roman"/>
+        <a:font script="Hebr" typeface="Times New Roman"/>
+        <a:font script="Thai" typeface="Angsana New"/>
+        <a:font script="Ethi" typeface="Nyala"/>
+        <a:font script="Beng" typeface="Vrinda"/>
+        <a:font script="Gujr" typeface="Shruti"/>
+        <a:font script="Khmr" typeface="MoolBoran"/>
+        <a:font script="Knda" typeface="Tunga"/>
+        <a:font script="Guru" typeface="Raavi"/>
+        <a:font script="Cans" typeface="Euphemia"/>
+        <a:font script="Cher" typeface="Plantagenet Cherokee"/>
+        <a:font script="Yiii" typeface="Microsoft Yi Baiti"/>
+        <a:font script="Tibt" typeface="Microsoft Himalaya"/>
+        <a:font script="Thaa" typeface="MV Boli"/>
+        <a:font script="Deva" typeface="Mangal"/>
+        <a:font script="Telu" typeface="Gautami"/>
+        <a:font script="Taml" typeface="Latha"/>
+        <a:font script="Syrc" typeface="Estrangelo Edessa"/>
+        <a:font script="Orya" typeface="Kalinga"/>
+        <a:font script="Mlym" typeface="Kartika"/>
+        <a:font script="Laoo" typeface="DokChampa"/>
+        <a:font script="Sinh" typeface="Iskoola Pota"/>
+        <a:font script="Mong" typeface="Mongolian Baiti"/>
+        <a:font script="Viet" typeface="Times New Roman"/>
+        <a:font script="Uigh" typeface="Microsoft Uighur"/>
+        <a:font script="Geor" typeface="Sylfaen"/>
+      </a:majorFont>
+      <a:minorFont>
+        <a:latin typeface="Arial"/>
+        <a:ea typeface=""/>
+        <a:cs typeface=""/>
+        <a:font script="Jpan" typeface="ＭＳ Ｐゴシック"/>
+        <a:font script="Hang" typeface="맑은 고딕"/>
+        <a:font script="Hans" typeface="宋体"/>
+        <a:font script="Hant" typeface="新細明體"/>
+        <a:font script="Arab" typeface="Arial"/>
+        <a:font script="Hebr" typeface="Arial"/>
+        <a:font script="Thai" typeface="Cordia New"/>
+        <a:font script="Ethi" typeface="Nyala"/>
+        <a:font script="Beng" typeface="Vrinda"/>
+        <a:font script="Gujr" typeface="Shruti"/>
+        <a:font script="Khmr" typeface="DaunPenh"/>
+        <a:font script="Knda" typeface="Tunga"/>
+        <a:font script="Guru" typeface="Raavi"/>
+        <a:font script="Cans" typeface="Euphemia"/>
+        <a:font script="Cher" typeface="Plantagenet Cherokee"/>
+        <a:font script="Yiii" typeface="Microsoft Yi Baiti"/>
+        <a:font script="Tibt" typeface="Microsoft Himalaya"/>
+        <a:font script="Thaa" typeface="MV Boli"/>
+        <a:font script="Deva" typeface="Mangal"/>
+        <a:font script="Telu" typeface="Gautami"/>
+        <a:font script="Taml" typeface="Latha"/>
+        <a:font script="Syrc" typeface="Estrangelo Edessa"/>
+        <a:font script="Orya" typeface="Kalinga"/>
+        <a:font script="Mlym" typeface="Kartika"/>
+        <a:font script="Laoo" typeface="DokChampa"/>
+        <a:font script="Sinh" typeface="Iskoola Pota"/>
+        <a:font script="Mong" typeface="Mongolian Baiti"/>
+        <a:font script="Viet" typeface="Arial"/>
+        <a:font script="Uigh" typeface="Microsoft Uighur"/>
+        <a:font script="Geor" typeface="Sylfaen"/>
+      </a:minorFont>
+    </a:fontScheme>
+    <a:fmtScheme name="Office">
+      <a:fillStyleLst>
+        <a:solidFill>
+          <a:schemeClr val="phClr"/>
+        </a:solidFill>
+        <a:gradFill rotWithShape="1">
+          <a:gsLst>
+            <a:gs pos="0">
+              <a:schemeClr val="phClr">
+                <a:tint val="50000"/>
+                <a:satMod val="300000"/>
+              </a:schemeClr>
+            </a:gs>
+            <a:gs pos="35000">
+              <a:schemeClr val="phClr">
+                <a:tint val="37000"/>
+                <a:satMod val="300000"/>
+              </a:schemeClr>
+            </a:gs>
+            <a:gs pos="100000">
+              <a:schemeClr val="phClr">
+                <a:tint val="15000"/>
+                <a:satMod val="350000"/>
+              </a:schemeClr>
+            </a:gs>
+          </a:gsLst>
+          <a:lin ang="16200000" scaled="1"/>
+        </a:gradFill>
+        <a:gradFill rotWithShape="1">
+          <a:gsLst>
+            <a:gs pos="0">
+              <a:schemeClr val="phClr">
+                <a:tint val="100000"/>
+                <a:shade val="100000"/>
+                <a:satMod val="130000"/>
+              </a:schemeClr>
+            </a:gs>
+            <a:gs pos="100000">
+              <a:schemeClr val="phClr">
+                <a:tint val="50000"/>
+                <a:shade val="100000"/>
+                <a:satMod val="350000"/>
+              </a:schemeClr>
+            </a:gs>
+          </a:gsLst>
+          <a:lin ang="16200000" scaled="0"/>
+        </a:gradFill>
+      </a:fillStyleLst>
+      <a:lnStyleLst>
+        <a:ln w="9525" cap="flat" cmpd="sng" algn="ctr">
+          <a:solidFill>
+            <a:schemeClr val="phClr">
+              <a:shade val="95000"/>
+              <a:satMod val="105000"/>
+            </a:schemeClr>
+          </a:solidFill>
+          <a:prstDash val="solid"/>
+        </a:ln>
+        <a:ln w="25400" cap="flat" cmpd="sng" algn="ctr">
+          <a:solidFill>
+            <a:schemeClr val="phClr"/>
+          </a:solidFill>
+          <a:prstDash val="solid"/>
+        </a:ln>
+        <a:ln w="38100" cap="flat" cmpd="sng" algn="ctr">
+          <a:solidFill>
+            <a:schemeClr val="phClr"/>
+          </a:solidFill>
+          <a:prstDash val="solid"/>
+        </a:ln>
+      </a:lnStyleLst>
+      <a:effectStyleLst>
+        <a:effectStyle>
+          <a:effectLst>
+            <a:outerShdw blurRad="40000" dist="20000" dir="5400000" rotWithShape="0">
+              <a:srgbClr val="000000">
+                <a:alpha val="38000"/>
+              </a:srgbClr>
+            </a:outerShdw>
+          </a:effectLst>
+        </a:effectStyle>
+        <a:effectStyle>
+          <a:effectLst>
+            <a:outerShdw blurRad="40000" dist="23000" dir="5400000" rotWithShape="0">
+              <a:srgbClr val="000000">
+                <a:alpha val="35000"/>
+              </a:srgbClr>
+            </a:outerShdw>
+          </a:effectLst>
+        </a:effectStyle>
+        <a:effectStyle>
+          <a:effectLst>
+            <a:outerShdw blurRad="40000" dist="23000" dir="5400000" rotWithShape="0">
+              <a:srgbClr val="000000">
+                <a:alpha val="35000"/>
+              </a:srgbClr>
+            </a:outerShdw>
+          </a:effectLst>
+          <a:scene3d>
+            <a:camera prst="orthographicFront">
+              <a:rot lat="0" lon="0" rev="0"/>
+            </a:camera>
+            <a:lightRig rig="threePt" dir="t">
+              <a:rot lat="0" lon="0" rev="1200000"/>
+            </a:lightRig>
+          </a:scene3d>
+          <a:sp3d>
+            <a:bevelT w="63500" h="25400"/>
+          </a:sp3d>
+        </a:effectStyle>
+      </a:effectStyleLst>
+      <a:bgFillStyleLst>
+        <a:solidFill>
+          <a:schemeClr val="phClr"/>
+        </a:solidFill>
+        <a:gradFill rotWithShape="1">
+          <a:gsLst>
+            <a:gs pos="0">
+              <a:schemeClr val="phClr">
+                <a:tint val="40000"/>
+                <a:satMod val="350000"/>
+              </a:schemeClr>
+            </a:gs>
+            <a:gs pos="40000">
+              <a:schemeClr val="phClr">
+                <a:tint val="45000"/>
+                <a:shade val="99000"/>
+                <a:satMod val="350000"/>
+              </a:schemeClr>
+            </a:gs>
+            <a:gs pos="100000">
+              <a:schemeClr val="phClr">
+                <a:shade val="20000"/>
+                <a:satMod val="255000"/>
+              </a:schemeClr>
+            </a:gs>
+          </a:gsLst>
+          <a:path path="circle">
+            <a:fillToRect l="50000" t="-80000" r="50000" b="180000"/>
+          </a:path>
+        </a:gradFill>
+        <a:gradFill rotWithShape="1">
+          <a:gsLst>
+            <a:gs pos="0">
+              <a:schemeClr val="phClr">
+                <a:tint val="80000"/>
+                <a:satMod val="300000"/>
+              </a:schemeClr>
+            </a:gs>
+            <a:gs pos="100000">
+              <a:schemeClr val="phClr">
+                <a:shade val="30000"/>
+                <a:satMod val="200000"/>
+              </a:schemeClr>
+            </a:gs>
+          </a:gsLst>
+          <a:path path="circle">
+            <a:fillToRect l="50000" t="50000" r="50000" b="50000"/>
+          </a:path>
+        </a:gradFill>
+      </a:bgFillStyleLst>
+    </a:fmtScheme>
+  </a:themeElements>
+</a:theme>
 </file>
 
-<file path=ppt/theme/theme1.xml><?xml version="1.0" encoding="utf-8"?>
+<file path=ppt/theme/theme2.xml><?xml version="1.0" encoding="utf-8"?>
 <a:theme xmlns:a="http://schemas.openxmlformats.org/drawingml/2006/main" xmlns:r="http://schemas.openxmlformats.org/officeDocument/2006/relationships" name="Simple Light">
   <a:themeElements>
     <a:clrScheme name="Simple Light">
@@ -16380,7 +16937,7 @@
 </a:theme>
 </file>
 
-<file path=ppt/theme/theme2.xml><?xml version="1.0" encoding="utf-8"?>
+<file path=ppt/theme/theme3.xml><?xml version="1.0" encoding="utf-8"?>
 <a:theme xmlns:a="http://schemas.openxmlformats.org/drawingml/2006/main" xmlns:r="http://schemas.openxmlformats.org/officeDocument/2006/relationships" name="Luxe">
   <a:themeElements>
     <a:clrScheme name="Luxe">
@@ -16657,283 +17214,4 @@
     </a:fmtScheme>
   </a:themeElements>
 </a:theme>
-</file>
-
-<file path=ppt/theme/theme3.xml><?xml version="1.0" encoding="utf-8"?>
-<a:theme xmlns:a="http://schemas.openxmlformats.org/drawingml/2006/main" xmlns:r="http://schemas.openxmlformats.org/officeDocument/2006/relationships">
-  <a:themeElements>
-    <a:clrScheme name="Default">
-      <a:dk1>
-        <a:srgbClr val="000000"/>
-      </a:dk1>
-      <a:lt1>
-        <a:srgbClr val="FFFFFF"/>
-      </a:lt1>
-      <a:dk2>
-        <a:srgbClr val="158158"/>
-      </a:dk2>
-      <a:lt2>
-        <a:srgbClr val="F3F3F3"/>
-      </a:lt2>
-      <a:accent1>
-        <a:srgbClr val="058DC7"/>
-      </a:accent1>
-      <a:accent2>
-        <a:srgbClr val="50B432"/>
-      </a:accent2>
-      <a:accent3>
-        <a:srgbClr val="ED561B"/>
-      </a:accent3>
-      <a:accent4>
-        <a:srgbClr val="EDEF00"/>
-      </a:accent4>
-      <a:accent5>
-        <a:srgbClr val="24CBE5"/>
-      </a:accent5>
-      <a:accent6>
-        <a:srgbClr val="64E572"/>
-      </a:accent6>
-      <a:hlink>
-        <a:srgbClr val="2200CC"/>
-      </a:hlink>
-      <a:folHlink>
-        <a:srgbClr val="551A8B"/>
-      </a:folHlink>
-    </a:clrScheme>
-    <a:fontScheme name="Office">
-      <a:majorFont>
-        <a:latin typeface="Arial"/>
-        <a:ea typeface=""/>
-        <a:cs typeface=""/>
-        <a:font script="Jpan" typeface="ＭＳ Ｐゴシック"/>
-        <a:font script="Hang" typeface="맑은 고딕"/>
-        <a:font script="Hans" typeface="宋体"/>
-        <a:font script="Hant" typeface="新細明體"/>
-        <a:font script="Arab" typeface="Times New Roman"/>
-        <a:font script="Hebr" typeface="Times New Roman"/>
-        <a:font script="Thai" typeface="Angsana New"/>
-        <a:font script="Ethi" typeface="Nyala"/>
-        <a:font script="Beng" typeface="Vrinda"/>
-        <a:font script="Gujr" typeface="Shruti"/>
-        <a:font script="Khmr" typeface="MoolBoran"/>
-        <a:font script="Knda" typeface="Tunga"/>
-        <a:font script="Guru" typeface="Raavi"/>
-        <a:font script="Cans" typeface="Euphemia"/>
-        <a:font script="Cher" typeface="Plantagenet Cherokee"/>
-        <a:font script="Yiii" typeface="Microsoft Yi Baiti"/>
-        <a:font script="Tibt" typeface="Microsoft Himalaya"/>
-        <a:font script="Thaa" typeface="MV Boli"/>
-        <a:font script="Deva" typeface="Mangal"/>
-        <a:font script="Telu" typeface="Gautami"/>
-        <a:font script="Taml" typeface="Latha"/>
-        <a:font script="Syrc" typeface="Estrangelo Edessa"/>
-        <a:font script="Orya" typeface="Kalinga"/>
-        <a:font script="Mlym" typeface="Kartika"/>
-        <a:font script="Laoo" typeface="DokChampa"/>
-        <a:font script="Sinh" typeface="Iskoola Pota"/>
-        <a:font script="Mong" typeface="Mongolian Baiti"/>
-        <a:font script="Viet" typeface="Times New Roman"/>
-        <a:font script="Uigh" typeface="Microsoft Uighur"/>
-        <a:font script="Geor" typeface="Sylfaen"/>
-      </a:majorFont>
-      <a:minorFont>
-        <a:latin typeface="Arial"/>
-        <a:ea typeface=""/>
-        <a:cs typeface=""/>
-        <a:font script="Jpan" typeface="ＭＳ Ｐゴシック"/>
-        <a:font script="Hang" typeface="맑은 고딕"/>
-        <a:font script="Hans" typeface="宋体"/>
-        <a:font script="Hant" typeface="新細明體"/>
-        <a:font script="Arab" typeface="Arial"/>
-        <a:font script="Hebr" typeface="Arial"/>
-        <a:font script="Thai" typeface="Cordia New"/>
-        <a:font script="Ethi" typeface="Nyala"/>
-        <a:font script="Beng" typeface="Vrinda"/>
-        <a:font script="Gujr" typeface="Shruti"/>
-        <a:font script="Khmr" typeface="DaunPenh"/>
-        <a:font script="Knda" typeface="Tunga"/>
-        <a:font script="Guru" typeface="Raavi"/>
-        <a:font script="Cans" typeface="Euphemia"/>
-        <a:font script="Cher" typeface="Plantagenet Cherokee"/>
-        <a:font script="Yiii" typeface="Microsoft Yi Baiti"/>
-        <a:font script="Tibt" typeface="Microsoft Himalaya"/>
-        <a:font script="Thaa" typeface="MV Boli"/>
-        <a:font script="Deva" typeface="Mangal"/>
-        <a:font script="Telu" typeface="Gautami"/>
-        <a:font script="Taml" typeface="Latha"/>
-        <a:font script="Syrc" typeface="Estrangelo Edessa"/>
-        <a:font script="Orya" typeface="Kalinga"/>
-        <a:font script="Mlym" typeface="Kartika"/>
-        <a:font script="Laoo" typeface="DokChampa"/>
-        <a:font script="Sinh" typeface="Iskoola Pota"/>
-        <a:font script="Mong" typeface="Mongolian Baiti"/>
-        <a:font script="Viet" typeface="Arial"/>
-        <a:font script="Uigh" typeface="Microsoft Uighur"/>
-        <a:font script="Geor" typeface="Sylfaen"/>
-      </a:minorFont>
-    </a:fontScheme>
-    <a:fmtScheme name="Office">
-      <a:fillStyleLst>
-        <a:solidFill>
-          <a:schemeClr val="phClr"/>
-        </a:solidFill>
-        <a:gradFill rotWithShape="1">
-          <a:gsLst>
-            <a:gs pos="0">
-              <a:schemeClr val="phClr">
-                <a:tint val="50000"/>
-                <a:satMod val="300000"/>
-              </a:schemeClr>
-            </a:gs>
-            <a:gs pos="35000">
-              <a:schemeClr val="phClr">
-                <a:tint val="37000"/>
-                <a:satMod val="300000"/>
-              </a:schemeClr>
-            </a:gs>
-            <a:gs pos="100000">
-              <a:schemeClr val="phClr">
-                <a:tint val="15000"/>
-                <a:satMod val="350000"/>
-              </a:schemeClr>
-            </a:gs>
-          </a:gsLst>
-          <a:lin ang="16200000" scaled="1"/>
-        </a:gradFill>
-        <a:gradFill rotWithShape="1">
-          <a:gsLst>
-            <a:gs pos="0">
-              <a:schemeClr val="phClr">
-                <a:tint val="100000"/>
-                <a:shade val="100000"/>
-                <a:satMod val="130000"/>
-              </a:schemeClr>
-            </a:gs>
-            <a:gs pos="100000">
-              <a:schemeClr val="phClr">
-                <a:tint val="50000"/>
-                <a:shade val="100000"/>
-                <a:satMod val="350000"/>
-              </a:schemeClr>
-            </a:gs>
-          </a:gsLst>
-          <a:lin ang="16200000" scaled="0"/>
-        </a:gradFill>
-      </a:fillStyleLst>
-      <a:lnStyleLst>
-        <a:ln w="9525" cap="flat" cmpd="sng" algn="ctr">
-          <a:solidFill>
-            <a:schemeClr val="phClr">
-              <a:shade val="95000"/>
-              <a:satMod val="105000"/>
-            </a:schemeClr>
-          </a:solidFill>
-          <a:prstDash val="solid"/>
-        </a:ln>
-        <a:ln w="25400" cap="flat" cmpd="sng" algn="ctr">
-          <a:solidFill>
-            <a:schemeClr val="phClr"/>
-          </a:solidFill>
-          <a:prstDash val="solid"/>
-        </a:ln>
-        <a:ln w="38100" cap="flat" cmpd="sng" algn="ctr">
-          <a:solidFill>
-            <a:schemeClr val="phClr"/>
-          </a:solidFill>
-          <a:prstDash val="solid"/>
-        </a:ln>
-      </a:lnStyleLst>
-      <a:effectStyleLst>
-        <a:effectStyle>
-          <a:effectLst>
-            <a:outerShdw blurRad="40000" dist="20000" dir="5400000" rotWithShape="0">
-              <a:srgbClr val="000000">
-                <a:alpha val="38000"/>
-              </a:srgbClr>
-            </a:outerShdw>
-          </a:effectLst>
-        </a:effectStyle>
-        <a:effectStyle>
-          <a:effectLst>
-            <a:outerShdw blurRad="40000" dist="23000" dir="5400000" rotWithShape="0">
-              <a:srgbClr val="000000">
-                <a:alpha val="35000"/>
-              </a:srgbClr>
-            </a:outerShdw>
-          </a:effectLst>
-        </a:effectStyle>
-        <a:effectStyle>
-          <a:effectLst>
-            <a:outerShdw blurRad="40000" dist="23000" dir="5400000" rotWithShape="0">
-              <a:srgbClr val="000000">
-                <a:alpha val="35000"/>
-              </a:srgbClr>
-            </a:outerShdw>
-          </a:effectLst>
-          <a:scene3d>
-            <a:camera prst="orthographicFront">
-              <a:rot lat="0" lon="0" rev="0"/>
-            </a:camera>
-            <a:lightRig rig="threePt" dir="t">
-              <a:rot lat="0" lon="0" rev="1200000"/>
-            </a:lightRig>
-          </a:scene3d>
-          <a:sp3d>
-            <a:bevelT w="63500" h="25400"/>
-          </a:sp3d>
-        </a:effectStyle>
-      </a:effectStyleLst>
-      <a:bgFillStyleLst>
-        <a:solidFill>
-          <a:schemeClr val="phClr"/>
-        </a:solidFill>
-        <a:gradFill rotWithShape="1">
-          <a:gsLst>
-            <a:gs pos="0">
-              <a:schemeClr val="phClr">
-                <a:tint val="40000"/>
-                <a:satMod val="350000"/>
-              </a:schemeClr>
-            </a:gs>
-            <a:gs pos="40000">
-              <a:schemeClr val="phClr">
-                <a:tint val="45000"/>
-                <a:shade val="99000"/>
-                <a:satMod val="350000"/>
-              </a:schemeClr>
-            </a:gs>
-            <a:gs pos="100000">
-              <a:schemeClr val="phClr">
-                <a:shade val="20000"/>
-                <a:satMod val="255000"/>
-              </a:schemeClr>
-            </a:gs>
-          </a:gsLst>
-          <a:path path="circle">
-            <a:fillToRect l="50000" t="-80000" r="50000" b="180000"/>
-          </a:path>
-        </a:gradFill>
-        <a:gradFill rotWithShape="1">
-          <a:gsLst>
-            <a:gs pos="0">
-              <a:schemeClr val="phClr">
-                <a:tint val="80000"/>
-                <a:satMod val="300000"/>
-              </a:schemeClr>
-            </a:gs>
-            <a:gs pos="100000">
-              <a:schemeClr val="phClr">
-                <a:shade val="30000"/>
-                <a:satMod val="200000"/>
-              </a:schemeClr>
-            </a:gs>
-          </a:gsLst>
-          <a:path path="circle">
-            <a:fillToRect l="50000" t="50000" r="50000" b="50000"/>
-          </a:path>
-        </a:gradFill>
-      </a:bgFillStyleLst>
-    </a:fmtScheme>
-  </a:themeElements>
-</a:theme>
 </file>
--- a/docs/milestone_5/Milestone_5_Presentation.pptx
+++ b/docs/milestone_5/Milestone_5_Presentation.pptx
@@ -12520,7 +12520,7 @@
         </p:nvSpPr>
         <p:spPr>
           <a:xfrm>
-            <a:off x="317500" y="1219200"/>
+            <a:off x="317550" y="1233650"/>
             <a:ext cx="8508900" cy="3352800"/>
           </a:xfrm>
           <a:prstGeom prst="rect">
@@ -13370,7 +13370,7 @@
             <a:tbl>
               <a:tblPr>
                 <a:noFill/>
-                <a:tableStyleId>{C09C7D6E-6C9F-45B6-A404-FF49D0E07950}</a:tableStyleId>
+                <a:tableStyleId>{2F0E4FCD-DAF7-4518-88B7-269AB71B6EED}</a:tableStyleId>
               </a:tblPr>
               <a:tblGrid>
                 <a:gridCol w="2286000"/>
@@ -14949,7 +14949,7 @@
             <a:tbl>
               <a:tblPr>
                 <a:noFill/>
-                <a:tableStyleId>{C09C7D6E-6C9F-45B6-A404-FF49D0E07950}</a:tableStyleId>
+                <a:tableStyleId>{2F0E4FCD-DAF7-4518-88B7-269AB71B6EED}</a:tableStyleId>
               </a:tblPr>
               <a:tblGrid>
                 <a:gridCol w="2921000"/>
@@ -16380,9 +16380,9 @@
 </file>
 
 <file path=ppt/theme/theme1.xml><?xml version="1.0" encoding="utf-8"?>
-<a:theme xmlns:a="http://schemas.openxmlformats.org/drawingml/2006/main" xmlns:r="http://schemas.openxmlformats.org/officeDocument/2006/relationships">
+<a:theme xmlns:a="http://schemas.openxmlformats.org/drawingml/2006/main" xmlns:r="http://schemas.openxmlformats.org/officeDocument/2006/relationships" name="Simple Light">
   <a:themeElements>
-    <a:clrScheme name="Default">
+    <a:clrScheme name="Simple Light">
       <a:dk1>
         <a:srgbClr val="000000"/>
       </a:dk1>
@@ -16390,34 +16390,34 @@
         <a:srgbClr val="FFFFFF"/>
       </a:lt1>
       <a:dk2>
-        <a:srgbClr val="158158"/>
+        <a:srgbClr val="595959"/>
       </a:dk2>
       <a:lt2>
-        <a:srgbClr val="F3F3F3"/>
+        <a:srgbClr val="EEEEEE"/>
       </a:lt2>
       <a:accent1>
-        <a:srgbClr val="058DC7"/>
+        <a:srgbClr val="4285F4"/>
       </a:accent1>
       <a:accent2>
-        <a:srgbClr val="50B432"/>
+        <a:srgbClr val="212121"/>
       </a:accent2>
       <a:accent3>
-        <a:srgbClr val="ED561B"/>
+        <a:srgbClr val="78909C"/>
       </a:accent3>
       <a:accent4>
-        <a:srgbClr val="EDEF00"/>
+        <a:srgbClr val="FFAB40"/>
       </a:accent4>
       <a:accent5>
-        <a:srgbClr val="24CBE5"/>
+        <a:srgbClr val="0097A7"/>
       </a:accent5>
       <a:accent6>
-        <a:srgbClr val="64E572"/>
+        <a:srgbClr val="EEFF41"/>
       </a:accent6>
       <a:hlink>
-        <a:srgbClr val="2200CC"/>
+        <a:srgbClr val="0097A7"/>
       </a:hlink>
       <a:folHlink>
-        <a:srgbClr val="551A8B"/>
+        <a:srgbClr val="0097A7"/>
       </a:folHlink>
     </a:clrScheme>
     <a:fontScheme name="Office">
@@ -16659,9 +16659,9 @@
 </file>
 
 <file path=ppt/theme/theme2.xml><?xml version="1.0" encoding="utf-8"?>
-<a:theme xmlns:a="http://schemas.openxmlformats.org/drawingml/2006/main" xmlns:r="http://schemas.openxmlformats.org/officeDocument/2006/relationships" name="Simple Light">
+<a:theme xmlns:a="http://schemas.openxmlformats.org/drawingml/2006/main" xmlns:r="http://schemas.openxmlformats.org/officeDocument/2006/relationships">
   <a:themeElements>
-    <a:clrScheme name="Simple Light">
+    <a:clrScheme name="Default">
       <a:dk1>
         <a:srgbClr val="000000"/>
       </a:dk1>
@@ -16669,34 +16669,34 @@
         <a:srgbClr val="FFFFFF"/>
       </a:lt1>
       <a:dk2>
-        <a:srgbClr val="595959"/>
+        <a:srgbClr val="158158"/>
       </a:dk2>
       <a:lt2>
-        <a:srgbClr val="EEEEEE"/>
+        <a:srgbClr val="F3F3F3"/>
       </a:lt2>
       <a:accent1>
-        <a:srgbClr val="4285F4"/>
+        <a:srgbClr val="058DC7"/>
       </a:accent1>
       <a:accent2>
-        <a:srgbClr val="212121"/>
+        <a:srgbClr val="50B432"/>
       </a:accent2>
       <a:accent3>
-        <a:srgbClr val="78909C"/>
+        <a:srgbClr val="ED561B"/>
       </a:accent3>
       <a:accent4>
-        <a:srgbClr val="FFAB40"/>
+        <a:srgbClr val="EDEF00"/>
       </a:accent4>
       <a:accent5>
-        <a:srgbClr val="0097A7"/>
+        <a:srgbClr val="24CBE5"/>
       </a:accent5>
       <a:accent6>
-        <a:srgbClr val="EEFF41"/>
+        <a:srgbClr val="64E572"/>
       </a:accent6>
       <a:hlink>
-        <a:srgbClr val="0097A7"/>
+        <a:srgbClr val="2200CC"/>
       </a:hlink>
       <a:folHlink>
-        <a:srgbClr val="0097A7"/>
+        <a:srgbClr val="551A8B"/>
       </a:folHlink>
     </a:clrScheme>
     <a:fontScheme name="Office">
